--- a/Plotting in Python with Matplotlib Slides.pptx
+++ b/Plotting in Python with Matplotlib Slides.pptx
@@ -138,7 +138,7 @@
 <file path=ppt/revisionInfo.xml><?xml version="1.0" encoding="utf-8"?>
 <p1510:revInfo xmlns:a="http://schemas.openxmlformats.org/drawingml/2006/main" xmlns:r="http://schemas.openxmlformats.org/officeDocument/2006/relationships" xmlns:p1510="http://schemas.microsoft.com/office/powerpoint/2015/10/main">
   <p1510:revLst>
-    <p1510:client id="{B1A209A4-1239-4CD1-A947-9D47872CA66C}" v="3" dt="2025-10-24T08:53:31.380"/>
+    <p1510:client id="{5299D9F6-F6BC-4CA5-9D41-EE8962C7CC1D}" v="2" dt="2026-10-09T10:10:27.543"/>
   </p1510:revLst>
 </p1510:revInfo>
 </file>
@@ -146,87 +146,20 @@
 <file path=ppt/changesInfos/changesInfo1.xml><?xml version="1.0" encoding="utf-8"?>
 <pc:chgInfo xmlns:a="http://schemas.openxmlformats.org/drawingml/2006/main" xmlns:r="http://schemas.openxmlformats.org/officeDocument/2006/relationships" xmlns:ac="http://schemas.microsoft.com/office/drawing/2013/main/command" xmlns:pc="http://schemas.microsoft.com/office/powerpoint/2013/main/command">
   <pc:docChgLst>
-    <pc:chgData name="Cooling, Chris" userId="6dcf99c9-2ba5-410a-8445-0893a3d1421f" providerId="ADAL" clId="{7056684F-ED0F-4C32-A0DA-6AFA7F6D1AF8}"/>
-    <pc:docChg chg="addSld delSld modSld">
-      <pc:chgData name="Cooling, Chris" userId="6dcf99c9-2ba5-410a-8445-0893a3d1421f" providerId="ADAL" clId="{7056684F-ED0F-4C32-A0DA-6AFA7F6D1AF8}" dt="2025-03-25T09:57:02.900" v="1"/>
+    <pc:chgData name="Cooling, Chris" userId="6dcf99c9-2ba5-410a-8445-0893a3d1421f" providerId="ADAL" clId="{0564427D-CD1D-4B33-9C97-2A8069F97102}"/>
+    <pc:docChg chg="custSel modSld">
+      <pc:chgData name="Cooling, Chris" userId="6dcf99c9-2ba5-410a-8445-0893a3d1421f" providerId="ADAL" clId="{0564427D-CD1D-4B33-9C97-2A8069F97102}" dt="2026-10-09T10:10:59.766" v="8" actId="14100"/>
       <pc:docMkLst>
         <pc:docMk/>
       </pc:docMkLst>
-      <pc:sldChg chg="add">
-        <pc:chgData name="Cooling, Chris" userId="6dcf99c9-2ba5-410a-8445-0893a3d1421f" providerId="ADAL" clId="{7056684F-ED0F-4C32-A0DA-6AFA7F6D1AF8}" dt="2025-03-25T09:57:02.900" v="1"/>
-        <pc:sldMkLst>
-          <pc:docMk/>
-          <pc:sldMk cId="1031427888" sldId="276"/>
-        </pc:sldMkLst>
-      </pc:sldChg>
-      <pc:sldChg chg="del">
-        <pc:chgData name="Cooling, Chris" userId="6dcf99c9-2ba5-410a-8445-0893a3d1421f" providerId="ADAL" clId="{7056684F-ED0F-4C32-A0DA-6AFA7F6D1AF8}" dt="2025-03-25T09:56:46.495" v="0" actId="47"/>
-        <pc:sldMkLst>
-          <pc:docMk/>
-          <pc:sldMk cId="3543295302" sldId="406"/>
-        </pc:sldMkLst>
-      </pc:sldChg>
-    </pc:docChg>
-  </pc:docChgLst>
-  <pc:docChgLst>
-    <pc:chgData name="Cooling, Chris" userId="6dcf99c9-2ba5-410a-8445-0893a3d1421f" providerId="ADAL" clId="{739BE2D0-369D-4BD5-8BA6-94C4381AF508}"/>
-    <pc:docChg chg="custSel addSld delSld modSld">
-      <pc:chgData name="Cooling, Chris" userId="6dcf99c9-2ba5-410a-8445-0893a3d1421f" providerId="ADAL" clId="{739BE2D0-369D-4BD5-8BA6-94C4381AF508}" dt="2025-02-17T10:56:17.387" v="599" actId="20577"/>
-      <pc:docMkLst>
-        <pc:docMk/>
-      </pc:docMkLst>
-      <pc:sldChg chg="modSp del mod">
-        <pc:chgData name="Cooling, Chris" userId="6dcf99c9-2ba5-410a-8445-0893a3d1421f" providerId="ADAL" clId="{739BE2D0-369D-4BD5-8BA6-94C4381AF508}" dt="2025-02-17T10:25:52.806" v="134" actId="47"/>
-        <pc:sldMkLst>
-          <pc:docMk/>
-          <pc:sldMk cId="4254443235" sldId="322"/>
-        </pc:sldMkLst>
-      </pc:sldChg>
-      <pc:sldChg chg="modSp add mod">
-        <pc:chgData name="Cooling, Chris" userId="6dcf99c9-2ba5-410a-8445-0893a3d1421f" providerId="ADAL" clId="{739BE2D0-369D-4BD5-8BA6-94C4381AF508}" dt="2025-02-17T10:25:48.380" v="133" actId="20577"/>
-        <pc:sldMkLst>
-          <pc:docMk/>
-          <pc:sldMk cId="474143756" sldId="324"/>
-        </pc:sldMkLst>
-      </pc:sldChg>
-      <pc:sldChg chg="modSp mod">
-        <pc:chgData name="Cooling, Chris" userId="6dcf99c9-2ba5-410a-8445-0893a3d1421f" providerId="ADAL" clId="{739BE2D0-369D-4BD5-8BA6-94C4381AF508}" dt="2025-02-17T10:26:50.293" v="137" actId="20577"/>
-        <pc:sldMkLst>
-          <pc:docMk/>
-          <pc:sldMk cId="16407505" sldId="361"/>
-        </pc:sldMkLst>
-      </pc:sldChg>
-      <pc:sldChg chg="modSp add mod">
-        <pc:chgData name="Cooling, Chris" userId="6dcf99c9-2ba5-410a-8445-0893a3d1421f" providerId="ADAL" clId="{739BE2D0-369D-4BD5-8BA6-94C4381AF508}" dt="2025-02-17T10:56:17.387" v="599" actId="20577"/>
-        <pc:sldMkLst>
-          <pc:docMk/>
-          <pc:sldMk cId="4288594215" sldId="407"/>
-        </pc:sldMkLst>
-      </pc:sldChg>
-    </pc:docChg>
-  </pc:docChgLst>
-  <pc:docChgLst>
-    <pc:chgData name="Cooling, Chris" userId="6dcf99c9-2ba5-410a-8445-0893a3d1421f" providerId="ADAL" clId="{B1A209A4-1239-4CD1-A947-9D47872CA66C}"/>
-    <pc:docChg chg="custSel delSld modSld">
-      <pc:chgData name="Cooling, Chris" userId="6dcf99c9-2ba5-410a-8445-0893a3d1421f" providerId="ADAL" clId="{B1A209A4-1239-4CD1-A947-9D47872CA66C}" dt="2025-10-24T10:08:29.746" v="8" actId="47"/>
-      <pc:docMkLst>
-        <pc:docMk/>
-      </pc:docMkLst>
-      <pc:sldChg chg="del">
-        <pc:chgData name="Cooling, Chris" userId="6dcf99c9-2ba5-410a-8445-0893a3d1421f" providerId="ADAL" clId="{B1A209A4-1239-4CD1-A947-9D47872CA66C}" dt="2025-10-24T10:08:29.746" v="8" actId="47"/>
-        <pc:sldMkLst>
-          <pc:docMk/>
-          <pc:sldMk cId="1031427888" sldId="276"/>
-        </pc:sldMkLst>
-      </pc:sldChg>
       <pc:sldChg chg="addSp delSp modSp mod">
-        <pc:chgData name="Cooling, Chris" userId="6dcf99c9-2ba5-410a-8445-0893a3d1421f" providerId="ADAL" clId="{B1A209A4-1239-4CD1-A947-9D47872CA66C}" dt="2025-10-24T08:53:31.376" v="7" actId="20577"/>
+        <pc:chgData name="Cooling, Chris" userId="6dcf99c9-2ba5-410a-8445-0893a3d1421f" providerId="ADAL" clId="{0564427D-CD1D-4B33-9C97-2A8069F97102}" dt="2026-10-09T10:10:59.766" v="8" actId="14100"/>
         <pc:sldMkLst>
           <pc:docMk/>
           <pc:sldMk cId="1507190070" sldId="359"/>
         </pc:sldMkLst>
         <pc:spChg chg="mod">
-          <ac:chgData name="Cooling, Chris" userId="6dcf99c9-2ba5-410a-8445-0893a3d1421f" providerId="ADAL" clId="{B1A209A4-1239-4CD1-A947-9D47872CA66C}" dt="2025-10-24T08:53:31.376" v="7" actId="20577"/>
+          <ac:chgData name="Cooling, Chris" userId="6dcf99c9-2ba5-410a-8445-0893a3d1421f" providerId="ADAL" clId="{0564427D-CD1D-4B33-9C97-2A8069F97102}" dt="2026-10-09T10:10:31.500" v="4" actId="255"/>
           <ac:spMkLst>
             <pc:docMk/>
             <pc:sldMk cId="1507190070" sldId="359"/>
@@ -234,7 +167,15 @@
           </ac:spMkLst>
         </pc:spChg>
         <pc:picChg chg="add mod">
-          <ac:chgData name="Cooling, Chris" userId="6dcf99c9-2ba5-410a-8445-0893a3d1421f" providerId="ADAL" clId="{B1A209A4-1239-4CD1-A947-9D47872CA66C}" dt="2025-10-16T13:20:20.527" v="5" actId="1076"/>
+          <ac:chgData name="Cooling, Chris" userId="6dcf99c9-2ba5-410a-8445-0893a3d1421f" providerId="ADAL" clId="{0564427D-CD1D-4B33-9C97-2A8069F97102}" dt="2026-10-09T10:10:59.766" v="8" actId="14100"/>
+          <ac:picMkLst>
+            <pc:docMk/>
+            <pc:sldMk cId="1507190070" sldId="359"/>
+            <ac:picMk id="5" creationId="{BDD09093-2823-8DF1-B87B-9EFAE4299CAD}"/>
+          </ac:picMkLst>
+        </pc:picChg>
+        <pc:picChg chg="del">
+          <ac:chgData name="Cooling, Chris" userId="6dcf99c9-2ba5-410a-8445-0893a3d1421f" providerId="ADAL" clId="{0564427D-CD1D-4B33-9C97-2A8069F97102}" dt="2026-10-09T10:09:53.155" v="0" actId="478"/>
           <ac:picMkLst>
             <pc:docMk/>
             <pc:sldMk cId="1507190070" sldId="359"/>
@@ -329,7 +270,7 @@
           <a:p>
             <a:fld id="{D2E0D2A8-8F95-47C2-ABE1-A779F5A43C98}" type="datetimeFigureOut">
               <a:rPr lang="en-US" smtClean="0"/>
-              <a:t>10/24/2025</a:t>
+              <a:t>10/9/2026</a:t>
             </a:fld>
             <a:endParaRPr lang="en-US"/>
           </a:p>
@@ -1316,7 +1257,7 @@
           <a:p>
             <a:fld id="{E5C7A2D4-509E-4D1B-BF00-3BBC2642DBBD}" type="datetime1">
               <a:rPr lang="en-GB" smtClean="0"/>
-              <a:t>24/10/2025</a:t>
+              <a:t>09/10/2026</a:t>
             </a:fld>
             <a:endParaRPr lang="en-GB"/>
           </a:p>
@@ -1642,7 +1583,7 @@
           <a:p>
             <a:fld id="{AC718188-43FA-4D60-9911-3A9354CBB8F0}" type="datetime1">
               <a:rPr lang="en-GB" smtClean="0"/>
-              <a:t>24/10/2025</a:t>
+              <a:t>09/10/2026</a:t>
             </a:fld>
             <a:endParaRPr lang="en-GB"/>
           </a:p>
@@ -1970,7 +1911,7 @@
           <a:p>
             <a:fld id="{D5CC1D0C-4BA4-4ED8-8E9E-74B79B8B15AD}" type="datetime1">
               <a:rPr lang="en-GB" smtClean="0"/>
-              <a:t>24/10/2025</a:t>
+              <a:t>09/10/2026</a:t>
             </a:fld>
             <a:endParaRPr lang="en-GB"/>
           </a:p>
@@ -2346,7 +2287,7 @@
           <a:p>
             <a:fld id="{A86C4125-ADB2-42DA-ABE1-4DDAB9F4BC14}" type="datetime1">
               <a:rPr lang="en-GB" smtClean="0"/>
-              <a:t>24/10/2025</a:t>
+              <a:t>09/10/2026</a:t>
             </a:fld>
             <a:endParaRPr lang="en-GB"/>
           </a:p>
@@ -2730,7 +2671,7 @@
           <a:p>
             <a:fld id="{942CF639-5BAD-4ECA-B213-95E662BF0AB8}" type="datetime1">
               <a:rPr lang="en-GB" smtClean="0"/>
-              <a:t>24/10/2025</a:t>
+              <a:t>09/10/2026</a:t>
             </a:fld>
             <a:endParaRPr lang="en-GB"/>
           </a:p>
@@ -3116,7 +3057,7 @@
           <a:p>
             <a:fld id="{F7CB4FB9-61F3-4706-A394-57353A4512E5}" type="datetime1">
               <a:rPr lang="en-GB" smtClean="0"/>
-              <a:t>24/10/2025</a:t>
+              <a:t>09/10/2026</a:t>
             </a:fld>
             <a:endParaRPr lang="en-GB"/>
           </a:p>
@@ -3344,7 +3285,7 @@
           <a:p>
             <a:fld id="{62D0D2E2-81C4-4D6A-95B8-392D5302E143}" type="datetime1">
               <a:rPr lang="en-GB" smtClean="0"/>
-              <a:t>24/10/2025</a:t>
+              <a:t>09/10/2026</a:t>
             </a:fld>
             <a:endParaRPr lang="en-GB"/>
           </a:p>
@@ -3842,7 +3783,7 @@
           <a:p>
             <a:fld id="{49F66B08-35C5-43AE-9AA1-890C9E633C9D}" type="datetime1">
               <a:rPr lang="en-GB" smtClean="0"/>
-              <a:t>24/10/2025</a:t>
+              <a:t>09/10/2026</a:t>
             </a:fld>
             <a:endParaRPr lang="en-GB"/>
           </a:p>
@@ -4342,7 +4283,7 @@
           <a:p>
             <a:fld id="{AE795793-2B16-4B31-9A7C-BA9277BD25E1}" type="datetime1">
               <a:rPr lang="en-GB" smtClean="0"/>
-              <a:t>24/10/2025</a:t>
+              <a:t>09/10/2026</a:t>
             </a:fld>
             <a:endParaRPr lang="en-GB"/>
           </a:p>
@@ -4832,7 +4773,7 @@
           <a:p>
             <a:fld id="{9096E0BA-400D-4C27-9DDD-FF0DB010D912}" type="datetime1">
               <a:rPr lang="en-GB" smtClean="0"/>
-              <a:t>24/10/2025</a:t>
+              <a:t>09/10/2026</a:t>
             </a:fld>
             <a:endParaRPr lang="en-GB"/>
           </a:p>
@@ -5643,7 +5584,7 @@
           <a:p>
             <a:fld id="{AA6FE078-0C53-421F-A43C-9782FD7307AA}" type="datetime1">
               <a:rPr lang="en-GB" smtClean="0"/>
-              <a:t>24/10/2025</a:t>
+              <a:t>09/10/2026</a:t>
             </a:fld>
             <a:endParaRPr lang="en-GB"/>
           </a:p>
@@ -6260,7 +6201,7 @@
           <a:p>
             <a:fld id="{EF24CE61-011F-49EA-A285-6F1DDE0A5DF4}" type="datetime1">
               <a:rPr lang="en-GB" smtClean="0"/>
-              <a:t>24/10/2025</a:t>
+              <a:t>09/10/2026</a:t>
             </a:fld>
             <a:endParaRPr lang="en-GB"/>
           </a:p>
@@ -6880,7 +6821,7 @@
           <a:p>
             <a:fld id="{B38D73BE-E705-46B7-BC89-BC8D7BD278BC}" type="datetime1">
               <a:rPr lang="en-GB" smtClean="0"/>
-              <a:t>24/10/2025</a:t>
+              <a:t>09/10/2026</a:t>
             </a:fld>
             <a:endParaRPr lang="en-GB"/>
           </a:p>
@@ -7051,7 +6992,7 @@
           <a:p>
             <a:fld id="{F14D7CDE-7B1E-4FBD-9A2F-C93AF1E00BB7}" type="datetime1">
               <a:rPr lang="en-GB" smtClean="0"/>
-              <a:t>24/10/2025</a:t>
+              <a:t>09/10/2026</a:t>
             </a:fld>
             <a:endParaRPr lang="en-GB"/>
           </a:p>
@@ -7224,7 +7165,7 @@
           <a:p>
             <a:fld id="{1BD07A87-E6D1-4117-8DC6-92C053157D5F}" type="datetime1">
               <a:rPr lang="en-GB" smtClean="0"/>
-              <a:t>24/10/2025</a:t>
+              <a:t>09/10/2026</a:t>
             </a:fld>
             <a:endParaRPr lang="en-GB"/>
           </a:p>
@@ -7403,7 +7344,7 @@
           <a:p>
             <a:fld id="{5939C7C3-54CE-4D8F-9204-334660AD10F0}" type="datetime1">
               <a:rPr lang="en-GB" smtClean="0"/>
-              <a:t>24/10/2025</a:t>
+              <a:t>09/10/2026</a:t>
             </a:fld>
             <a:endParaRPr lang="en-GB" dirty="0"/>
           </a:p>
@@ -7597,7 +7538,7 @@
           <a:p>
             <a:fld id="{1FA3C102-8BAA-4F00-A81B-2DD04A5C8C39}" type="datetime1">
               <a:rPr lang="en-GB" smtClean="0"/>
-              <a:t>24/10/2025</a:t>
+              <a:t>09/10/2026</a:t>
             </a:fld>
             <a:endParaRPr lang="en-GB" dirty="0"/>
           </a:p>
@@ -7877,7 +7818,7 @@
           <a:p>
             <a:fld id="{A2EED6ED-B9A6-4C24-9796-047AA68D3B81}" type="datetime1">
               <a:rPr lang="en-GB" smtClean="0"/>
-              <a:t>24/10/2025</a:t>
+              <a:t>09/10/2026</a:t>
             </a:fld>
             <a:endParaRPr lang="en-GB" dirty="0"/>
           </a:p>
@@ -8158,7 +8099,7 @@
           <a:p>
             <a:fld id="{40B309BC-F231-47A4-B368-76EDD209C8C8}" type="datetime1">
               <a:rPr lang="en-GB" smtClean="0"/>
-              <a:t>24/10/2025</a:t>
+              <a:t>09/10/2026</a:t>
             </a:fld>
             <a:endParaRPr lang="en-GB" dirty="0"/>
           </a:p>
@@ -8438,7 +8379,7 @@
           <a:p>
             <a:fld id="{BFB0E597-AB25-47D4-B585-F29B3A935439}" type="datetime1">
               <a:rPr lang="en-GB" smtClean="0"/>
-              <a:t>24/10/2025</a:t>
+              <a:t>09/10/2026</a:t>
             </a:fld>
             <a:endParaRPr lang="en-GB" dirty="0"/>
           </a:p>
@@ -8914,7 +8855,7 @@
           <a:p>
             <a:fld id="{B8E58AD8-DBDA-4C25-9024-C000E46B0C3A}" type="datetime1">
               <a:rPr lang="en-GB" smtClean="0"/>
-              <a:t>24/10/2025</a:t>
+              <a:t>09/10/2026</a:t>
             </a:fld>
             <a:endParaRPr lang="en-GB" dirty="0"/>
           </a:p>
@@ -9194,7 +9135,7 @@
           <a:p>
             <a:fld id="{1FD3C405-49EB-4652-B989-B09465A57833}" type="datetime1">
               <a:rPr lang="en-GB" smtClean="0"/>
-              <a:t>24/10/2025</a:t>
+              <a:t>09/10/2026</a:t>
             </a:fld>
             <a:endParaRPr lang="en-GB" dirty="0"/>
           </a:p>
@@ -9474,7 +9415,7 @@
           <a:p>
             <a:fld id="{45DC1DE3-986A-4265-8DAC-82679DB192C9}" type="datetime1">
               <a:rPr lang="en-GB" smtClean="0"/>
-              <a:t>24/10/2025</a:t>
+              <a:t>09/10/2026</a:t>
             </a:fld>
             <a:endParaRPr lang="en-GB" dirty="0"/>
           </a:p>
@@ -9738,7 +9679,7 @@
           <a:p>
             <a:fld id="{5114ABF5-1FE3-4E04-B71E-B7E78F6E63BF}" type="datetime1">
               <a:rPr lang="en-GB" smtClean="0"/>
-              <a:t>24/10/2025</a:t>
+              <a:t>09/10/2026</a:t>
             </a:fld>
             <a:endParaRPr lang="en-GB"/>
           </a:p>
@@ -10126,7 +10067,7 @@
           <a:p>
             <a:fld id="{B06E0DFC-FDBA-495A-ACA3-A9B9713F363E}" type="datetime1">
               <a:rPr lang="en-GB" smtClean="0"/>
-              <a:t>24/10/2025</a:t>
+              <a:t>09/10/2026</a:t>
             </a:fld>
             <a:endParaRPr lang="en-GB"/>
           </a:p>
@@ -10508,7 +10449,7 @@
           <a:p>
             <a:fld id="{6BD77909-9A00-4992-8645-106E920C148E}" type="datetime1">
               <a:rPr lang="en-GB" smtClean="0"/>
-              <a:t>24/10/2025</a:t>
+              <a:t>09/10/2026</a:t>
             </a:fld>
             <a:endParaRPr lang="en-GB"/>
           </a:p>
@@ -10880,7 +10821,7 @@
           <a:p>
             <a:fld id="{2AFB2A30-436D-4FE7-BD5D-4583405D27F2}" type="datetime1">
               <a:rPr lang="en-GB" smtClean="0"/>
-              <a:t>24/10/2025</a:t>
+              <a:t>09/10/2026</a:t>
             </a:fld>
             <a:endParaRPr lang="en-GB"/>
           </a:p>
@@ -11287,7 +11228,7 @@
           <a:p>
             <a:fld id="{BB70C1B7-BFB6-4332-8A23-51E326F6AB73}" type="datetime1">
               <a:rPr lang="en-GB" smtClean="0"/>
-              <a:t>24/10/2025</a:t>
+              <a:t>09/10/2026</a:t>
             </a:fld>
             <a:endParaRPr lang="en-GB"/>
           </a:p>
@@ -11696,7 +11637,7 @@
           <a:p>
             <a:fld id="{34527B30-7BAB-490F-93A4-B1B05D7E266E}" type="datetime1">
               <a:rPr lang="en-GB" smtClean="0"/>
-              <a:t>24/10/2025</a:t>
+              <a:t>09/10/2026</a:t>
             </a:fld>
             <a:endParaRPr lang="en-GB"/>
           </a:p>
@@ -12095,7 +12036,7 @@
           <a:p>
             <a:fld id="{E170416F-D7DB-44F8-9216-512C69EC7EE9}" type="datetime1">
               <a:rPr lang="en-GB" smtClean="0"/>
-              <a:t>24/10/2025</a:t>
+              <a:t>09/10/2026</a:t>
             </a:fld>
             <a:endParaRPr lang="en-GB"/>
           </a:p>
@@ -12893,7 +12834,7 @@
           <a:p>
             <a:fld id="{D500E946-BCAF-4D68-ADE7-B8C07AC630B0}" type="datetime1">
               <a:rPr lang="en-GB" smtClean="0"/>
-              <a:t>24/10/2025</a:t>
+              <a:t>09/10/2026</a:t>
             </a:fld>
             <a:endParaRPr lang="en-GB"/>
           </a:p>
@@ -13497,7 +13438,7 @@
           <a:p>
             <a:fld id="{D6995C2C-B1DC-4981-B1FC-B3C1972BA961}" type="datetime1">
               <a:rPr lang="en-GB" smtClean="0"/>
-              <a:t>24/10/2025</a:t>
+              <a:t>09/10/2026</a:t>
             </a:fld>
             <a:endParaRPr lang="en-GB"/>
           </a:p>
@@ -14091,7 +14032,7 @@
           <a:p>
             <a:fld id="{9F0A19F8-4691-4F20-93BF-107A0709A17B}" type="datetime1">
               <a:rPr lang="en-GB" smtClean="0"/>
-              <a:t>24/10/2025</a:t>
+              <a:t>09/10/2026</a:t>
             </a:fld>
             <a:endParaRPr lang="en-GB"/>
           </a:p>
@@ -14428,7 +14369,7 @@
           <a:p>
             <a:fld id="{8AC5DE67-160D-4E30-937F-FE5EB3FEFBA4}" type="datetime1">
               <a:rPr lang="en-GB" smtClean="0"/>
-              <a:t>24/10/2025</a:t>
+              <a:t>09/10/2026</a:t>
             </a:fld>
             <a:endParaRPr lang="en-GB"/>
           </a:p>
@@ -14767,7 +14708,7 @@
           <a:p>
             <a:fld id="{5F71D9BE-C00D-49E6-A4E9-7FF51EF093D1}" type="datetime1">
               <a:rPr lang="en-GB" smtClean="0"/>
-              <a:t>24/10/2025</a:t>
+              <a:t>09/10/2026</a:t>
             </a:fld>
             <a:endParaRPr lang="en-GB"/>
           </a:p>
@@ -15096,7 +15037,7 @@
           <a:p>
             <a:fld id="{9E64C64A-7437-4773-9658-E1FBB2A40BBD}" type="datetime1">
               <a:rPr lang="en-GB" smtClean="0"/>
-              <a:t>24/10/2025</a:t>
+              <a:t>09/10/2026</a:t>
             </a:fld>
             <a:endParaRPr lang="en-GB"/>
           </a:p>
@@ -15433,7 +15374,7 @@
           <a:p>
             <a:fld id="{F0373F17-E6E3-4AAF-AC1D-361A750BE5DC}" type="datetime1">
               <a:rPr lang="en-GB" smtClean="0"/>
-              <a:t>24/10/2025</a:t>
+              <a:t>09/10/2026</a:t>
             </a:fld>
             <a:endParaRPr lang="en-GB"/>
           </a:p>
@@ -15772,7 +15713,7 @@
           <a:p>
             <a:fld id="{69A919A1-31FF-4B02-91EA-78731E954715}" type="datetime1">
               <a:rPr lang="en-GB" smtClean="0"/>
-              <a:t>24/10/2025</a:t>
+              <a:t>09/10/2026</a:t>
             </a:fld>
             <a:endParaRPr lang="en-GB"/>
           </a:p>
@@ -16101,7 +16042,7 @@
           <a:p>
             <a:fld id="{23E877CB-A3E7-4FF7-BDB7-BD4511F97DE6}" type="datetime1">
               <a:rPr lang="en-GB" smtClean="0"/>
-              <a:t>24/10/2025</a:t>
+              <a:t>09/10/2026</a:t>
             </a:fld>
             <a:endParaRPr lang="en-GB"/>
           </a:p>
@@ -16339,7 +16280,7 @@
           <a:p>
             <a:fld id="{FC695F00-7B8D-4487-8BEC-1106FCC20504}" type="datetime1">
               <a:rPr lang="en-GB" smtClean="0"/>
-              <a:t>24/10/2025</a:t>
+              <a:t>09/10/2026</a:t>
             </a:fld>
             <a:endParaRPr lang="en-GB"/>
           </a:p>
@@ -16775,7 +16716,7 @@
           <a:p>
             <a:fld id="{136C3789-276B-4AA8-B726-2D6546568C3C}" type="datetime1">
               <a:rPr lang="en-GB" smtClean="0"/>
-              <a:t>24/10/2025</a:t>
+              <a:t>09/10/2026</a:t>
             </a:fld>
             <a:endParaRPr lang="en-GB"/>
           </a:p>
@@ -17313,7 +17254,7 @@
           <a:p>
             <a:fld id="{7C5975BF-6B10-4E88-A37A-C2325E8EA74D}" type="datetime1">
               <a:rPr lang="en-GB" smtClean="0"/>
-              <a:t>24/10/2025</a:t>
+              <a:t>09/10/2026</a:t>
             </a:fld>
             <a:endParaRPr lang="en-GB"/>
           </a:p>
@@ -17592,7 +17533,7 @@
           <a:p>
             <a:fld id="{2921EB1E-B189-4841-87F6-C5C35B2AF1A0}" type="datetime1">
               <a:rPr lang="en-GB" smtClean="0"/>
-              <a:t>24/10/2025</a:t>
+              <a:t>09/10/2026</a:t>
             </a:fld>
             <a:endParaRPr lang="en-GB"/>
           </a:p>
@@ -17877,7 +17818,7 @@
           <a:p>
             <a:fld id="{01C5AB27-8D95-44FC-AA44-826493E7D06D}" type="datetime1">
               <a:rPr lang="en-GB" smtClean="0"/>
-              <a:t>24/10/2025</a:t>
+              <a:t>09/10/2026</a:t>
             </a:fld>
             <a:endParaRPr lang="en-GB"/>
           </a:p>
@@ -18170,7 +18111,7 @@
           <a:p>
             <a:fld id="{C0E963B0-C23E-4775-B818-9308814A27F1}" type="datetime1">
               <a:rPr lang="en-GB" smtClean="0"/>
-              <a:t>24/10/2025</a:t>
+              <a:t>09/10/2026</a:t>
             </a:fld>
             <a:endParaRPr lang="en-GB"/>
           </a:p>
@@ -18587,7 +18528,7 @@
           <a:p>
             <a:fld id="{EA445BD8-D8AF-4E93-BA66-C54D350368AD}" type="datetime1">
               <a:rPr lang="en-GB" smtClean="0"/>
-              <a:t>24/10/2025</a:t>
+              <a:t>09/10/2026</a:t>
             </a:fld>
             <a:endParaRPr lang="en-GB" dirty="0"/>
           </a:p>
@@ -19378,7 +19319,7 @@
           <a:p>
             <a:fld id="{81B29A81-DA66-4397-B1B5-F97764FA7D32}" type="datetime1">
               <a:rPr lang="en-GB" smtClean="0"/>
-              <a:t>24/10/2025</a:t>
+              <a:t>09/10/2026</a:t>
             </a:fld>
             <a:endParaRPr lang="en-GB"/>
           </a:p>
@@ -19677,7 +19618,7 @@
           <a:p>
             <a:fld id="{32E73D5C-B207-45D9-810C-3B257089DCE4}" type="datetime1">
               <a:rPr lang="en-GB" smtClean="0"/>
-              <a:t>24/10/2025</a:t>
+              <a:t>09/10/2026</a:t>
             </a:fld>
             <a:endParaRPr lang="en-GB"/>
           </a:p>
@@ -20013,7 +19954,7 @@
           <a:p>
             <a:fld id="{6E0350A5-0E1C-4E70-B0B6-3373B5C9F5CF}" type="datetime1">
               <a:rPr lang="en-GB" smtClean="0"/>
-              <a:t>24/10/2025</a:t>
+              <a:t>09/10/2026</a:t>
             </a:fld>
             <a:endParaRPr lang="en-GB"/>
           </a:p>
@@ -20183,7 +20124,7 @@
           <a:p>
             <a:fld id="{4B4BC937-2805-4BE1-9C10-C67D8B6C9243}" type="datetime1">
               <a:rPr lang="en-GB" smtClean="0"/>
-              <a:t>24/10/2025</a:t>
+              <a:t>09/10/2026</a:t>
             </a:fld>
             <a:endParaRPr lang="en-GB"/>
           </a:p>
@@ -20515,7 +20456,7 @@
           <a:p>
             <a:fld id="{B0ECD5EC-1C2F-4E5C-817B-92E54AD71364}" type="datetime1">
               <a:rPr lang="en-GB" smtClean="0"/>
-              <a:t>24/10/2025</a:t>
+              <a:t>09/10/2026</a:t>
             </a:fld>
             <a:endParaRPr lang="en-GB"/>
           </a:p>
@@ -20672,7 +20613,7 @@
               <a:buChar char="•"/>
             </a:pPr>
             <a:r>
-              <a:rPr lang="en-GB" sz="3000" dirty="0"/>
+              <a:rPr lang="en-GB" sz="2800" dirty="0"/>
               <a:t>Once you’ve completed this course, please provide feedback</a:t>
             </a:r>
           </a:p>
@@ -20682,27 +20623,16 @@
               <a:buChar char="•"/>
             </a:pPr>
             <a:r>
-              <a:rPr lang="en-GB" sz="2600" dirty="0"/>
-              <a:t>The link </a:t>
-            </a:r>
-            <a:r>
-              <a:rPr lang="en-GB" sz="2600"/>
-              <a:t>is </a:t>
-            </a:r>
-            <a:r>
-              <a:rPr lang="en-GB" sz="2600" u="sng">
-                <a:solidFill>
-                  <a:srgbClr val="0563C1"/>
-                </a:solidFill>
+              <a:rPr lang="en-GB" sz="2800" dirty="0"/>
+              <a:t>The link is </a:t>
+            </a:r>
+            <a:r>
+              <a:rPr lang="en-GB" sz="2800" dirty="0">
                 <a:hlinkClick r:id="rId3"/>
               </a:rPr>
-              <a:t>https://ecri.short.gy/feedback-rcds</a:t>
-            </a:r>
-            <a:endParaRPr lang="en-GB" sz="2600" u="sng">
-              <a:solidFill>
-                <a:srgbClr val="0563C1"/>
-              </a:solidFill>
-            </a:endParaRPr>
+              <a:t>https://ecri.short.gy/feedback-plot-py</a:t>
+            </a:r>
+            <a:endParaRPr lang="en-GB" sz="2800" dirty="0"/>
           </a:p>
           <a:p>
             <a:pPr marL="457200" lvl="1" indent="-457200">
@@ -20710,12 +20640,8 @@
               <a:buChar char="•"/>
             </a:pPr>
             <a:r>
-              <a:rPr lang="en-GB" sz="2600"/>
-              <a:t>You </a:t>
-            </a:r>
-            <a:r>
-              <a:rPr lang="en-GB" sz="2600" dirty="0"/>
-              <a:t>should also have received an email with this link</a:t>
+              <a:rPr lang="en-GB" sz="2800" dirty="0"/>
+              <a:t>You should also have received an email with this link</a:t>
             </a:r>
           </a:p>
           <a:p>
@@ -20724,7 +20650,7 @@
               <a:buChar char="•"/>
             </a:pPr>
             <a:r>
-              <a:rPr lang="en-GB" sz="2600" dirty="0"/>
+              <a:rPr lang="en-GB" sz="2800" dirty="0"/>
               <a:t>This helps us improve the class for future students</a:t>
             </a:r>
           </a:p>
@@ -20735,10 +20661,10 @@
       </p:sp>
       <p:pic>
         <p:nvPicPr>
-          <p:cNvPr id="10" name="Picture 9" descr="A qr code on a white background&#10;&#10;AI-generated content may be incorrect.">
-            <a:extLst>
-              <a:ext uri="{FF2B5EF4-FFF2-40B4-BE49-F238E27FC236}">
-                <a16:creationId xmlns:a16="http://schemas.microsoft.com/office/drawing/2014/main" id="{50B9FAF5-2A53-D52B-CE70-2EBC7C63CD06}"/>
+          <p:cNvPr id="5" name="Picture 4">
+            <a:extLst>
+              <a:ext uri="{FF2B5EF4-FFF2-40B4-BE49-F238E27FC236}">
+                <a16:creationId xmlns:a16="http://schemas.microsoft.com/office/drawing/2014/main" id="{BDD09093-2823-8DF1-B87B-9EFAE4299CAD}"/>
               </a:ext>
             </a:extLst>
           </p:cNvPr>
@@ -20761,8 +20687,8 @@
         </p:blipFill>
         <p:spPr>
           <a:xfrm>
-            <a:off x="185915" y="837385"/>
-            <a:ext cx="5348975" cy="5348975"/>
+            <a:off x="330987" y="1032710"/>
+            <a:ext cx="5057726" cy="5057726"/>
           </a:xfrm>
           <a:prstGeom prst="rect">
             <a:avLst/>
